--- a/ICSSCS_2026_Detailed_v3.pptx
+++ b/ICSSCS_2026_Detailed_v3.pptx
@@ -5157,8 +5157,8 @@
         </p:blipFill>
         <p:spPr>
           <a:xfrm>
-            <a:off x="200000" y="1050001"/>
-            <a:ext cx="4200000" cy="2350000"/>
+            <a:off x="516000" y="1184351"/>
+            <a:ext cx="4200000" cy="3163838"/>
           </a:xfrm>
           <a:prstGeom prst="rect">
             <a:avLst/>
@@ -5173,7 +5173,7 @@
         </p:nvSpPr>
         <p:spPr>
           <a:xfrm>
-            <a:off x="200000" y="3353322"/>
+            <a:off x="200000" y="4348189"/>
             <a:ext cx="4100000" cy="200000"/>
           </a:xfrm>
           <a:prstGeom prst="rect">
@@ -5189,7 +5189,7 @@
           <a:p>
             <a:pPr algn="ctr"/>
             <a:r>
-              <a:rPr sz="900" b="0" i="1">
+              <a:rPr sz="900" b="0" i="1" dirty="0">
                 <a:solidFill>
                   <a:srgbClr val="444444"/>
                 </a:solidFill>
@@ -5244,14 +5244,14 @@
           <p:nvPr>
             <p:extLst>
               <p:ext uri="{D42A27DB-BD31-4B8C-83A1-F6EECF244321}">
-                <p14:modId xmlns:p14="http://schemas.microsoft.com/office/powerpoint/2010/main" val="480105315"/>
+                <p14:modId xmlns:p14="http://schemas.microsoft.com/office/powerpoint/2010/main" val="677124159"/>
               </p:ext>
             </p:extLst>
           </p:nvPr>
         </p:nvGraphicFramePr>
         <p:xfrm>
-          <a:off x="4788000" y="1090000"/>
-          <a:ext cx="4300000" cy="1856232"/>
+          <a:off x="4716000" y="1402234"/>
+          <a:ext cx="4300000" cy="2560163"/>
         </p:xfrm>
         <a:graphic>
           <a:graphicData uri="http://schemas.openxmlformats.org/drawingml/2006/table">
@@ -5289,7 +5289,7 @@
                   </a:extLst>
                 </a:gridCol>
               </a:tblGrid>
-              <a:tr h="128569">
+              <a:tr h="239621">
                 <a:tc>
                   <a:txBody>
                     <a:bodyPr/>
@@ -5388,7 +5388,7 @@
                   </a:ext>
                 </a:extLst>
               </a:tr>
-              <a:tr h="207515">
+              <a:tr h="386757">
                 <a:tc>
                   <a:txBody>
                     <a:bodyPr/>
@@ -5487,7 +5487,7 @@
                   </a:ext>
                 </a:extLst>
               </a:tr>
-              <a:tr h="207515">
+              <a:tr h="386757">
                 <a:tc>
                   <a:txBody>
                     <a:bodyPr/>
@@ -5586,7 +5586,7 @@
                   </a:ext>
                 </a:extLst>
               </a:tr>
-              <a:tr h="207515">
+              <a:tr h="386757">
                 <a:tc>
                   <a:txBody>
                     <a:bodyPr/>
@@ -5685,7 +5685,7 @@
                   </a:ext>
                 </a:extLst>
               </a:tr>
-              <a:tr h="207515">
+              <a:tr h="386757">
                 <a:tc>
                   <a:txBody>
                     <a:bodyPr/>
@@ -5784,7 +5784,7 @@
                   </a:ext>
                 </a:extLst>
               </a:tr>
-              <a:tr h="207515">
+              <a:tr h="386757">
                 <a:tc>
                   <a:txBody>
                     <a:bodyPr/>
@@ -5883,7 +5883,7 @@
                   </a:ext>
                 </a:extLst>
               </a:tr>
-              <a:tr h="207515">
+              <a:tr h="386757">
                 <a:tc>
                   <a:txBody>
                     <a:bodyPr/>
@@ -6055,7 +6055,7 @@
         <p:spPr>
           <a:xfrm>
             <a:off x="350000" y="1277578"/>
-            <a:ext cx="4200000" cy="1800000"/>
+            <a:ext cx="4200000" cy="2041585"/>
           </a:xfrm>
           <a:prstGeom prst="rect">
             <a:avLst/>
@@ -6232,23 +6232,8 @@
                 </a:solidFill>
                 <a:latin typeface="Century Gothic"/>
               </a:rPr>
-              <a:t>Global Avg Pooling reduces overfitting vs </a:t>
-            </a:r>
-            <a:r>
-              <a:rPr sz="1100" dirty="0" err="1">
-                <a:solidFill>
-                  <a:srgbClr val="000000"/>
-                </a:solidFill>
-                <a:latin typeface="Century Gothic"/>
-              </a:rPr>
-              <a:t>Flatten+Dense</a:t>
-            </a:r>
-            <a:endParaRPr sz="1100" dirty="0">
-              <a:solidFill>
-                <a:srgbClr val="000000"/>
-              </a:solidFill>
-              <a:latin typeface="Century Gothic"/>
-            </a:endParaRPr>
+              <a:t>Global Avg Pooling reduces overfitting vs Flatten</a:t>
+            </a:r>
           </a:p>
         </p:txBody>
       </p:sp>
@@ -6268,8 +6253,8 @@
         </p:blipFill>
         <p:spPr>
           <a:xfrm>
-            <a:off x="349999" y="3305378"/>
-            <a:ext cx="5493239" cy="1800000"/>
+            <a:off x="2282580" y="3256442"/>
+            <a:ext cx="4935976" cy="1887057"/>
           </a:xfrm>
           <a:prstGeom prst="rect">
             <a:avLst/>
@@ -6411,13 +6396,13 @@
           <p:nvPr>
             <p:extLst>
               <p:ext uri="{D42A27DB-BD31-4B8C-83A1-F6EECF244321}">
-                <p14:modId xmlns:p14="http://schemas.microsoft.com/office/powerpoint/2010/main" val="1456662689"/>
+                <p14:modId xmlns:p14="http://schemas.microsoft.com/office/powerpoint/2010/main" val="2565080670"/>
               </p:ext>
             </p:extLst>
           </p:nvPr>
         </p:nvGraphicFramePr>
         <p:xfrm>
-          <a:off x="4847064" y="1453378"/>
+          <a:off x="4847064" y="1277578"/>
           <a:ext cx="4200000" cy="2014728"/>
         </p:xfrm>
         <a:graphic>
@@ -9401,7 +9386,7 @@
         </p:nvSpPr>
         <p:spPr>
           <a:xfrm>
-            <a:off x="200000" y="3145000"/>
+            <a:off x="200000" y="3090000"/>
             <a:ext cx="4300000" cy="330000"/>
           </a:xfrm>
           <a:prstGeom prst="rect">
@@ -11169,7 +11154,7 @@
         <p:spPr>
           <a:xfrm>
             <a:off x="1656550" y="1369063"/>
-            <a:ext cx="3857100" cy="2488500"/>
+            <a:ext cx="3857100" cy="2026165"/>
           </a:xfrm>
           <a:prstGeom prst="rect">
             <a:avLst/>
@@ -11185,7 +11170,7 @@
           </a:bodyPr>
           <a:lstStyle/>
           <a:p>
-            <a:pPr marL="342900" lvl="0" indent="-342900" algn="l" rtl="0">
+            <a:pPr lvl="0" algn="l" rtl="0">
               <a:spcBef>
                 <a:spcPts val="0"/>
               </a:spcBef>
@@ -11196,11 +11181,9 @@
                 <a:schemeClr val="dk1"/>
               </a:buClr>
               <a:buSzPts val="1800"/>
-              <a:buFont typeface="Noto Sans Symbols"/>
-              <a:buChar char="🠶"/>
             </a:pPr>
             <a:r>
-              <a:rPr lang="en" sz="1300" b="1">
+              <a:rPr lang="en" sz="1300" b="1" dirty="0">
                 <a:solidFill>
                   <a:schemeClr val="dk1"/>
                 </a:solidFill>
@@ -11211,7 +11194,7 @@
               </a:rPr>
               <a:t>1.  Introduction &amp; Problem Statement</a:t>
             </a:r>
-            <a:endParaRPr sz="1559" b="1">
+            <a:endParaRPr sz="1559" b="1" dirty="0">
               <a:solidFill>
                 <a:schemeClr val="dk1"/>
               </a:solidFill>
@@ -11222,7 +11205,7 @@
             </a:endParaRPr>
           </a:p>
           <a:p>
-            <a:pPr marL="342900" lvl="0" indent="-342900" algn="l" rtl="0">
+            <a:pPr lvl="0" algn="l" rtl="0">
               <a:spcBef>
                 <a:spcPts val="1000"/>
               </a:spcBef>
@@ -11233,11 +11216,9 @@
                 <a:schemeClr val="dk1"/>
               </a:buClr>
               <a:buSzPts val="1800"/>
-              <a:buFont typeface="Noto Sans Symbols"/>
-              <a:buChar char="🠶"/>
             </a:pPr>
             <a:r>
-              <a:rPr lang="en" sz="1300" b="1">
+              <a:rPr lang="en" sz="1300" b="1" dirty="0">
                 <a:solidFill>
                   <a:schemeClr val="dk1"/>
                 </a:solidFill>
@@ -11248,7 +11229,7 @@
               </a:rPr>
               <a:t>2.  Dataset Description (MNIST)</a:t>
             </a:r>
-            <a:endParaRPr sz="1559" b="1">
+            <a:endParaRPr sz="1559" b="1" dirty="0">
               <a:solidFill>
                 <a:schemeClr val="dk1"/>
               </a:solidFill>
@@ -11259,7 +11240,7 @@
             </a:endParaRPr>
           </a:p>
           <a:p>
-            <a:pPr marL="342900" lvl="0" indent="-342900" algn="l" rtl="0">
+            <a:pPr lvl="0" algn="l" rtl="0">
               <a:spcBef>
                 <a:spcPts val="1000"/>
               </a:spcBef>
@@ -11270,11 +11251,9 @@
                 <a:schemeClr val="dk1"/>
               </a:buClr>
               <a:buSzPts val="1800"/>
-              <a:buFont typeface="Noto Sans Symbols"/>
-              <a:buChar char="🠶"/>
             </a:pPr>
             <a:r>
-              <a:rPr lang="en" sz="1300" b="1">
+              <a:rPr lang="en" sz="1300" b="1" dirty="0">
                 <a:solidFill>
                   <a:schemeClr val="dk1"/>
                 </a:solidFill>
@@ -11285,7 +11264,7 @@
               </a:rPr>
               <a:t>3.  Methodology — Data Preprocessing</a:t>
             </a:r>
-            <a:endParaRPr sz="1559" b="1">
+            <a:endParaRPr sz="1559" b="1" dirty="0">
               <a:solidFill>
                 <a:schemeClr val="dk1"/>
               </a:solidFill>
@@ -11296,7 +11275,7 @@
             </a:endParaRPr>
           </a:p>
           <a:p>
-            <a:pPr marL="342900" lvl="0" indent="-342900" algn="l" rtl="0">
+            <a:pPr lvl="0" algn="l" rtl="0">
               <a:spcBef>
                 <a:spcPts val="1000"/>
               </a:spcBef>
@@ -11307,11 +11286,9 @@
                 <a:schemeClr val="dk1"/>
               </a:buClr>
               <a:buSzPts val="1800"/>
-              <a:buFont typeface="Noto Sans Symbols"/>
-              <a:buChar char="🠶"/>
             </a:pPr>
             <a:r>
-              <a:rPr lang="en" sz="1300" b="1">
+              <a:rPr lang="en" sz="1300" b="1" dirty="0">
                 <a:solidFill>
                   <a:schemeClr val="dk1"/>
                 </a:solidFill>
@@ -11322,7 +11299,7 @@
               </a:rPr>
               <a:t>4.  Methodology — CNN Architecture</a:t>
             </a:r>
-            <a:endParaRPr sz="1559" b="1">
+            <a:endParaRPr sz="1559" b="1" dirty="0">
               <a:solidFill>
                 <a:schemeClr val="dk1"/>
               </a:solidFill>
@@ -11333,7 +11310,7 @@
             </a:endParaRPr>
           </a:p>
           <a:p>
-            <a:pPr marL="342900" lvl="0" indent="-342900" algn="l" rtl="0">
+            <a:pPr lvl="0" algn="l" rtl="0">
               <a:spcBef>
                 <a:spcPts val="1000"/>
               </a:spcBef>
@@ -11344,11 +11321,9 @@
                 <a:schemeClr val="dk1"/>
               </a:buClr>
               <a:buSzPts val="1800"/>
-              <a:buFont typeface="Noto Sans Symbols"/>
-              <a:buChar char="🠶"/>
             </a:pPr>
             <a:r>
-              <a:rPr lang="en" sz="1300" b="1">
+              <a:rPr lang="en" sz="1300" b="1" dirty="0">
                 <a:solidFill>
                   <a:schemeClr val="dk1"/>
                 </a:solidFill>
@@ -11359,7 +11334,7 @@
               </a:rPr>
               <a:t>5.  Methodology — Training Strategy</a:t>
             </a:r>
-            <a:endParaRPr sz="1559" b="1">
+            <a:endParaRPr sz="1559" b="1" dirty="0">
               <a:solidFill>
                 <a:schemeClr val="dk1"/>
               </a:solidFill>
@@ -11370,7 +11345,7 @@
             </a:endParaRPr>
           </a:p>
           <a:p>
-            <a:pPr marL="342900" lvl="0" indent="-342900" algn="l" rtl="0">
+            <a:pPr lvl="0" algn="l" rtl="0">
               <a:spcBef>
                 <a:spcPts val="1000"/>
               </a:spcBef>
@@ -11381,11 +11356,9 @@
                 <a:schemeClr val="dk1"/>
               </a:buClr>
               <a:buSzPts val="1800"/>
-              <a:buFont typeface="Noto Sans Symbols"/>
-              <a:buChar char="🠶"/>
             </a:pPr>
             <a:r>
-              <a:rPr lang="en" sz="1300" b="1">
+              <a:rPr lang="en" sz="1300" b="1" dirty="0">
                 <a:solidFill>
                   <a:schemeClr val="dk1"/>
                 </a:solidFill>
@@ -11396,7 +11369,7 @@
               </a:rPr>
               <a:t>6.  Results — Training Performance</a:t>
             </a:r>
-            <a:endParaRPr sz="1559" b="1">
+            <a:endParaRPr sz="1559" b="1" dirty="0">
               <a:solidFill>
                 <a:schemeClr val="dk1"/>
               </a:solidFill>
@@ -13030,41 +13003,6 @@
               </a:rPr>
               <a:t>Digit 0: 5,923 | Digit 1: 6,742 | Digit 2: 5,958 | Digit 3: 6,131 | Digit 4: 5,842
 Digit 5: 5,421 | Digit 6: 5,918 | Digit 7: 6,265 | Digit 8: 5,851 | Digit 9: 5,949</a:t>
-            </a:r>
-          </a:p>
-        </p:txBody>
-      </p:sp>
-      <p:sp>
-        <p:nvSpPr>
-          <p:cNvPr id="11" name="TextBox 10"/>
-          <p:cNvSpPr txBox="1"/>
-          <p:nvPr/>
-        </p:nvSpPr>
-        <p:spPr>
-          <a:xfrm>
-            <a:off x="300000" y="4800000"/>
-            <a:ext cx="8500000" cy="300000"/>
-          </a:xfrm>
-          <a:prstGeom prst="rect">
-            <a:avLst/>
-          </a:prstGeom>
-          <a:noFill/>
-        </p:spPr>
-        <p:txBody>
-          <a:bodyPr wrap="square">
-            <a:spAutoFit/>
-          </a:bodyPr>
-          <a:lstStyle/>
-          <a:p>
-            <a:pPr algn="ctr"/>
-            <a:r>
-              <a:rPr sz="1100" b="1" i="0">
-                <a:solidFill>
-                  <a:srgbClr val="728653"/>
-                </a:solidFill>
-                <a:latin typeface="Century Gothic"/>
-              </a:rPr>
-              <a:t>✓ Near-uniform distribution — no significant class imbalance in MNIST</a:t>
             </a:r>
           </a:p>
         </p:txBody>
